--- a/PPT/AWS API Gateway/AWS API Gateway.pptx
+++ b/PPT/AWS API Gateway/AWS API Gateway.pptx
@@ -5,7 +5,7 @@
     <p:sldMasterId id="2147483659" r:id="rId1"/>
   </p:sldMasterIdLst>
   <p:notesMasterIdLst>
-    <p:notesMasterId r:id="rId44"/>
+    <p:notesMasterId r:id="rId45"/>
   </p:notesMasterIdLst>
   <p:sldIdLst>
     <p:sldId id="297" r:id="rId2"/>
@@ -44,29 +44,30 @@
     <p:sldId id="288" r:id="rId35"/>
     <p:sldId id="289" r:id="rId36"/>
     <p:sldId id="290" r:id="rId37"/>
-    <p:sldId id="291" r:id="rId38"/>
-    <p:sldId id="292" r:id="rId39"/>
-    <p:sldId id="293" r:id="rId40"/>
-    <p:sldId id="294" r:id="rId41"/>
-    <p:sldId id="295" r:id="rId42"/>
-    <p:sldId id="296" r:id="rId43"/>
+    <p:sldId id="298" r:id="rId38"/>
+    <p:sldId id="291" r:id="rId39"/>
+    <p:sldId id="292" r:id="rId40"/>
+    <p:sldId id="293" r:id="rId41"/>
+    <p:sldId id="294" r:id="rId42"/>
+    <p:sldId id="295" r:id="rId43"/>
+    <p:sldId id="296" r:id="rId44"/>
   </p:sldIdLst>
   <p:sldSz cx="12192000" cy="6858000"/>
   <p:notesSz cx="6858000" cy="9144000"/>
   <p:embeddedFontLst>
     <p:embeddedFont>
       <p:font typeface="Inter" panose="020B0604020202020204" charset="0"/>
-      <p:regular r:id="rId45"/>
-      <p:bold r:id="rId46"/>
-      <p:italic r:id="rId47"/>
-      <p:boldItalic r:id="rId48"/>
+      <p:regular r:id="rId46"/>
+      <p:bold r:id="rId47"/>
+      <p:italic r:id="rId48"/>
+      <p:boldItalic r:id="rId49"/>
     </p:embeddedFont>
     <p:embeddedFont>
       <p:font typeface="Inter Medium" panose="020B0604020202020204" charset="0"/>
-      <p:regular r:id="rId49"/>
-      <p:bold r:id="rId50"/>
-      <p:italic r:id="rId51"/>
-      <p:boldItalic r:id="rId52"/>
+      <p:regular r:id="rId50"/>
+      <p:bold r:id="rId51"/>
+      <p:italic r:id="rId52"/>
+      <p:boldItalic r:id="rId53"/>
     </p:embeddedFont>
   </p:embeddedFontLst>
   <p:defaultTextStyle>
@@ -1849,7 +1850,7 @@
               </a:spcAft>
               <a:buNone/>
             </a:pPr>
-            <a:endParaRPr/>
+            <a:endParaRPr dirty="0"/>
           </a:p>
         </p:txBody>
       </p:sp>
@@ -14902,6 +14903,18 @@
   <p:clrMapOvr>
     <a:masterClrMapping/>
   </p:clrMapOvr>
+  <mc:AlternateContent xmlns:mc="http://schemas.openxmlformats.org/markup-compatibility/2006" xmlns:p14="http://schemas.microsoft.com/office/powerpoint/2010/main">
+    <mc:Choice Requires="p14">
+      <p:transition spd="slow" p14:dur="4400" advTm="1686">
+        <p14:honeycomb/>
+      </p:transition>
+    </mc:Choice>
+    <mc:Fallback xmlns="">
+      <p:transition spd="slow" advTm="1686">
+        <p:fade/>
+      </p:transition>
+    </mc:Fallback>
+  </mc:AlternateContent>
 </p:sld>
 </file>
 
@@ -15535,6 +15548,9 @@
   <p:clrMapOvr>
     <a:masterClrMapping/>
   </p:clrMapOvr>
+  <p:transition spd="slow" advTm="453">
+    <p:wipe/>
+  </p:transition>
 </p:sld>
 </file>
 
@@ -16594,6 +16610,9 @@
   <p:clrMapOvr>
     <a:masterClrMapping/>
   </p:clrMapOvr>
+  <p:transition spd="slow" advTm="243">
+    <p:cover/>
+  </p:transition>
 </p:sld>
 </file>
 
@@ -16810,6 +16829,18 @@
   <p:clrMapOvr>
     <a:masterClrMapping/>
   </p:clrMapOvr>
+  <mc:AlternateContent xmlns:mc="http://schemas.openxmlformats.org/markup-compatibility/2006" xmlns:p14="http://schemas.microsoft.com/office/powerpoint/2010/main">
+    <mc:Choice Requires="p14">
+      <p:transition spd="slow" p14:dur="1300" advTm="715">
+        <p14:pan dir="u"/>
+      </p:transition>
+    </mc:Choice>
+    <mc:Fallback xmlns="">
+      <p:transition spd="slow" advTm="715">
+        <p:fade/>
+      </p:transition>
+    </mc:Fallback>
+  </mc:AlternateContent>
 </p:sld>
 </file>
 
@@ -17527,6 +17558,18 @@
   <p:clrMapOvr>
     <a:masterClrMapping/>
   </p:clrMapOvr>
+  <mc:AlternateContent xmlns:mc="http://schemas.openxmlformats.org/markup-compatibility/2006" xmlns:p15="http://schemas.microsoft.com/office/powerpoint/2012/main">
+    <mc:Choice Requires="p15">
+      <p:transition xmlns:p14="http://schemas.microsoft.com/office/powerpoint/2010/main" spd="slow" p14:dur="1250" advTm="441">
+        <p15:prstTrans prst="pageCurlDouble"/>
+      </p:transition>
+    </mc:Choice>
+    <mc:Fallback xmlns="">
+      <p:transition spd="slow" advTm="441">
+        <p:fade/>
+      </p:transition>
+    </mc:Fallback>
+  </mc:AlternateContent>
 </p:sld>
 </file>
 
@@ -18244,6 +18287,18 @@
   <p:clrMapOvr>
     <a:masterClrMapping/>
   </p:clrMapOvr>
+  <mc:AlternateContent xmlns:mc="http://schemas.openxmlformats.org/markup-compatibility/2006" xmlns:p14="http://schemas.microsoft.com/office/powerpoint/2010/main">
+    <mc:Choice Requires="p14">
+      <p:transition spd="slow" p14:dur="900" advTm="390">
+        <p14:warp dir="in"/>
+      </p:transition>
+    </mc:Choice>
+    <mc:Fallback xmlns="">
+      <p:transition spd="slow" advTm="390">
+        <p:fade/>
+      </p:transition>
+    </mc:Fallback>
+  </mc:AlternateContent>
 </p:sld>
 </file>
 
@@ -18899,6 +18954,18 @@
   <p:clrMapOvr>
     <a:masterClrMapping/>
   </p:clrMapOvr>
+  <mc:AlternateContent xmlns:mc="http://schemas.openxmlformats.org/markup-compatibility/2006" xmlns:p14="http://schemas.microsoft.com/office/powerpoint/2010/main">
+    <mc:Choice Requires="p14">
+      <p:transition spd="slow" p14:dur="1300" advTm="54">
+        <p14:pan dir="u"/>
+      </p:transition>
+    </mc:Choice>
+    <mc:Fallback xmlns="">
+      <p:transition spd="slow" advTm="54">
+        <p:fade/>
+      </p:transition>
+    </mc:Fallback>
+  </mc:AlternateContent>
 </p:sld>
 </file>
 
@@ -19554,6 +19621,18 @@
   <p:clrMapOvr>
     <a:masterClrMapping/>
   </p:clrMapOvr>
+  <mc:AlternateContent xmlns:mc="http://schemas.openxmlformats.org/markup-compatibility/2006" xmlns:p14="http://schemas.microsoft.com/office/powerpoint/2010/main">
+    <mc:Choice Requires="p14">
+      <p:transition spd="slow" p14:dur="2000" advTm="256">
+        <p14:ferris dir="l"/>
+      </p:transition>
+    </mc:Choice>
+    <mc:Fallback xmlns="">
+      <p:transition spd="slow" advTm="256">
+        <p:fade/>
+      </p:transition>
+    </mc:Fallback>
+  </mc:AlternateContent>
 </p:sld>
 </file>
 
@@ -20247,6 +20326,18 @@
   <p:clrMapOvr>
     <a:masterClrMapping/>
   </p:clrMapOvr>
+  <mc:AlternateContent xmlns:mc="http://schemas.openxmlformats.org/markup-compatibility/2006" xmlns:p14="http://schemas.microsoft.com/office/powerpoint/2010/main">
+    <mc:Choice Requires="p14">
+      <p:transition spd="slow" p14:dur="1600" advTm="213">
+        <p14:prism isContent="1" isInverted="1"/>
+      </p:transition>
+    </mc:Choice>
+    <mc:Fallback xmlns="">
+      <p:transition spd="slow" advTm="213">
+        <p:fade/>
+      </p:transition>
+    </mc:Fallback>
+  </mc:AlternateContent>
 </p:sld>
 </file>
 
@@ -20796,6 +20887,18 @@
   <p:clrMapOvr>
     <a:masterClrMapping/>
   </p:clrMapOvr>
+  <mc:AlternateContent xmlns:mc="http://schemas.openxmlformats.org/markup-compatibility/2006" xmlns:p14="http://schemas.microsoft.com/office/powerpoint/2010/main">
+    <mc:Choice Requires="p14">
+      <p:transition spd="slow" p14:dur="1600" advTm="410">
+        <p14:conveyor dir="l"/>
+      </p:transition>
+    </mc:Choice>
+    <mc:Fallback xmlns="">
+      <p:transition spd="slow" advTm="410">
+        <p:fade/>
+      </p:transition>
+    </mc:Fallback>
+  </mc:AlternateContent>
 </p:sld>
 </file>
 
@@ -21403,6 +21506,18 @@
   <p:clrMapOvr>
     <a:masterClrMapping/>
   </p:clrMapOvr>
+  <mc:AlternateContent xmlns:mc="http://schemas.openxmlformats.org/markup-compatibility/2006" xmlns:p14="http://schemas.microsoft.com/office/powerpoint/2010/main">
+    <mc:Choice Requires="p14">
+      <p:transition spd="slow" p14:dur="800" advTm="380">
+        <p14:flythrough/>
+      </p:transition>
+    </mc:Choice>
+    <mc:Fallback xmlns="">
+      <p:transition spd="slow" advTm="380">
+        <p:fade/>
+      </p:transition>
+    </mc:Fallback>
+  </mc:AlternateContent>
 </p:sld>
 </file>
 
@@ -21672,6 +21787,18 @@
   <p:clrMapOvr>
     <a:masterClrMapping/>
   </p:clrMapOvr>
+  <mc:AlternateContent xmlns:mc="http://schemas.openxmlformats.org/markup-compatibility/2006" xmlns:p14="http://schemas.microsoft.com/office/powerpoint/2010/main">
+    <mc:Choice Requires="p14">
+      <p:transition spd="slow" p14:dur="1600" advTm="131">
+        <p14:gallery dir="l"/>
+      </p:transition>
+    </mc:Choice>
+    <mc:Fallback xmlns="">
+      <p:transition spd="slow" advTm="131">
+        <p:fade/>
+      </p:transition>
+    </mc:Fallback>
+  </mc:AlternateContent>
 </p:sld>
 </file>
 
@@ -22352,6 +22479,18 @@
   <p:clrMapOvr>
     <a:masterClrMapping/>
   </p:clrMapOvr>
+  <mc:AlternateContent xmlns:mc="http://schemas.openxmlformats.org/markup-compatibility/2006" xmlns:p14="http://schemas.microsoft.com/office/powerpoint/2010/main">
+    <mc:Choice Requires="p14">
+      <p:transition spd="slow" p14:dur="1500" advTm="663">
+        <p14:window dir="vert"/>
+      </p:transition>
+    </mc:Choice>
+    <mc:Fallback xmlns="">
+      <p:transition spd="slow" advTm="663">
+        <p:fade/>
+      </p:transition>
+    </mc:Fallback>
+  </mc:AlternateContent>
 </p:sld>
 </file>
 
@@ -23251,6 +23390,18 @@
   <p:clrMapOvr>
     <a:masterClrMapping/>
   </p:clrMapOvr>
+  <mc:AlternateContent xmlns:mc="http://schemas.openxmlformats.org/markup-compatibility/2006" xmlns:p14="http://schemas.microsoft.com/office/powerpoint/2010/main">
+    <mc:Choice Requires="p14">
+      <p:transition spd="slow" p14:dur="1200" advTm="490">
+        <p14:prism/>
+      </p:transition>
+    </mc:Choice>
+    <mc:Fallback xmlns="">
+      <p:transition spd="slow" advTm="490">
+        <p:fade/>
+      </p:transition>
+    </mc:Fallback>
+  </mc:AlternateContent>
 </p:sld>
 </file>
 
@@ -23995,6 +24146,18 @@
   <p:clrMapOvr>
     <a:masterClrMapping/>
   </p:clrMapOvr>
+  <mc:AlternateContent xmlns:mc="http://schemas.openxmlformats.org/markup-compatibility/2006" xmlns:p14="http://schemas.microsoft.com/office/powerpoint/2010/main">
+    <mc:Choice Requires="p14">
+      <p:transition spd="slow" p14:dur="1600" advTm="635">
+        <p14:prism isContent="1" isInverted="1"/>
+      </p:transition>
+    </mc:Choice>
+    <mc:Fallback xmlns="">
+      <p:transition spd="slow" advTm="635">
+        <p:fade/>
+      </p:transition>
+    </mc:Fallback>
+  </mc:AlternateContent>
 </p:sld>
 </file>
 
@@ -24846,6 +25009,18 @@
   <p:clrMapOvr>
     <a:masterClrMapping/>
   </p:clrMapOvr>
+  <mc:AlternateContent xmlns:mc="http://schemas.openxmlformats.org/markup-compatibility/2006" xmlns:p14="http://schemas.microsoft.com/office/powerpoint/2010/main">
+    <mc:Choice Requires="p14">
+      <p:transition spd="slow" p14:dur="2000" advTm="502">
+        <p14:ferris dir="l"/>
+      </p:transition>
+    </mc:Choice>
+    <mc:Fallback xmlns="">
+      <p:transition spd="slow" advTm="502">
+        <p:fade/>
+      </p:transition>
+    </mc:Fallback>
+  </mc:AlternateContent>
 </p:sld>
 </file>
 
@@ -25062,6 +25237,18 @@
   <p:clrMapOvr>
     <a:masterClrMapping/>
   </p:clrMapOvr>
+  <mc:AlternateContent xmlns:mc="http://schemas.openxmlformats.org/markup-compatibility/2006" xmlns:p14="http://schemas.microsoft.com/office/powerpoint/2010/main">
+    <mc:Choice Requires="p14">
+      <p:transition spd="slow" p14:dur="1250" advTm="500">
+        <p14:flip dir="r"/>
+      </p:transition>
+    </mc:Choice>
+    <mc:Fallback xmlns="">
+      <p:transition spd="slow" advTm="500">
+        <p:fade/>
+      </p:transition>
+    </mc:Fallback>
+  </mc:AlternateContent>
 </p:sld>
 </file>
 
@@ -25805,6 +25992,18 @@
   <p:clrMapOvr>
     <a:masterClrMapping/>
   </p:clrMapOvr>
+  <mc:AlternateContent xmlns:mc="http://schemas.openxmlformats.org/markup-compatibility/2006" xmlns:p15="http://schemas.microsoft.com/office/powerpoint/2012/main">
+    <mc:Choice Requires="p15">
+      <p:transition xmlns:p14="http://schemas.microsoft.com/office/powerpoint/2010/main" spd="slow" p14:dur="1250" advTm="456">
+        <p15:prstTrans prst="airplane"/>
+      </p:transition>
+    </mc:Choice>
+    <mc:Fallback xmlns="">
+      <p:transition spd="slow" advTm="456">
+        <p:fade/>
+      </p:transition>
+    </mc:Fallback>
+  </mc:AlternateContent>
 </p:sld>
 </file>
 
@@ -26592,6 +26791,9 @@
   <p:clrMapOvr>
     <a:masterClrMapping/>
   </p:clrMapOvr>
+  <p:transition spd="slow" advTm="86">
+    <p:comb/>
+  </p:transition>
 </p:sld>
 </file>
 
@@ -27461,6 +27663,18 @@
   <p:clrMapOvr>
     <a:masterClrMapping/>
   </p:clrMapOvr>
+  <mc:AlternateContent xmlns:mc="http://schemas.openxmlformats.org/markup-compatibility/2006" xmlns:p15="http://schemas.microsoft.com/office/powerpoint/2012/main">
+    <mc:Choice Requires="p15">
+      <p:transition xmlns:p14="http://schemas.microsoft.com/office/powerpoint/2010/main" spd="slow" p14:dur="2750" advTm="561">
+        <p15:prstTrans prst="prestige"/>
+      </p:transition>
+    </mc:Choice>
+    <mc:Fallback xmlns="">
+      <p:transition spd="slow" advTm="561">
+        <p:fade/>
+      </p:transition>
+    </mc:Fallback>
+  </mc:AlternateContent>
 </p:sld>
 </file>
 
@@ -27677,6 +27891,9 @@
   <p:clrMapOvr>
     <a:masterClrMapping/>
   </p:clrMapOvr>
+  <p:transition spd="slow" advTm="386">
+    <p:randomBar dir="vert"/>
+  </p:transition>
 </p:sld>
 </file>
 
@@ -28216,6 +28433,9 @@
   <p:clrMapOvr>
     <a:masterClrMapping/>
   </p:clrMapOvr>
+  <p:transition spd="slow" advTm="164">
+    <p:push dir="u"/>
+  </p:transition>
 </p:sld>
 </file>
 
@@ -29067,6 +29287,18 @@
   <p:clrMapOvr>
     <a:masterClrMapping/>
   </p:clrMapOvr>
+  <mc:AlternateContent xmlns:mc="http://schemas.openxmlformats.org/markup-compatibility/2006" xmlns:p14="http://schemas.microsoft.com/office/powerpoint/2010/main">
+    <mc:Choice Requires="p14">
+      <p:transition spd="slow" p14:dur="1200" advTm="248">
+        <p14:prism/>
+      </p:transition>
+    </mc:Choice>
+    <mc:Fallback xmlns="">
+      <p:transition spd="slow" advTm="248">
+        <p:fade/>
+      </p:transition>
+    </mc:Fallback>
+  </mc:AlternateContent>
 </p:sld>
 </file>
 
@@ -29782,6 +30014,18 @@
   <p:clrMapOvr>
     <a:masterClrMapping/>
   </p:clrMapOvr>
+  <mc:AlternateContent xmlns:mc="http://schemas.openxmlformats.org/markup-compatibility/2006" xmlns:p15="http://schemas.microsoft.com/office/powerpoint/2012/main">
+    <mc:Choice Requires="p15">
+      <p:transition xmlns:p14="http://schemas.microsoft.com/office/powerpoint/2010/main" spd="slow" p14:dur="1250" advTm="650">
+        <p15:prstTrans prst="pageCurlDouble"/>
+      </p:transition>
+    </mc:Choice>
+    <mc:Fallback xmlns="">
+      <p:transition spd="slow" advTm="650">
+        <p:fade/>
+      </p:transition>
+    </mc:Fallback>
+  </mc:AlternateContent>
 </p:sld>
 </file>
 
@@ -29998,6 +30242,18 @@
   <p:clrMapOvr>
     <a:masterClrMapping/>
   </p:clrMapOvr>
+  <mc:AlternateContent xmlns:mc="http://schemas.openxmlformats.org/markup-compatibility/2006" xmlns:p15="http://schemas.microsoft.com/office/powerpoint/2012/main">
+    <mc:Choice Requires="p15">
+      <p:transition xmlns:p14="http://schemas.microsoft.com/office/powerpoint/2010/main" spd="slow" p14:dur="2000" advTm="475">
+        <p15:prstTrans prst="drape"/>
+      </p:transition>
+    </mc:Choice>
+    <mc:Fallback xmlns="">
+      <p:transition spd="slow" advTm="475">
+        <p:fade/>
+      </p:transition>
+    </mc:Fallback>
+  </mc:AlternateContent>
 </p:sld>
 </file>
 
@@ -30659,6 +30915,18 @@
   <p:clrMapOvr>
     <a:masterClrMapping/>
   </p:clrMapOvr>
+  <mc:AlternateContent xmlns:mc="http://schemas.openxmlformats.org/markup-compatibility/2006" xmlns:p15="http://schemas.microsoft.com/office/powerpoint/2012/main">
+    <mc:Choice Requires="p15">
+      <p:transition xmlns:p14="http://schemas.microsoft.com/office/powerpoint/2010/main" spd="slow" p14:dur="2000" advTm="509">
+        <p15:prstTrans prst="prestige"/>
+      </p:transition>
+    </mc:Choice>
+    <mc:Fallback xmlns="">
+      <p:transition spd="slow" advTm="509">
+        <p:fade/>
+      </p:transition>
+    </mc:Fallback>
+  </mc:AlternateContent>
 </p:sld>
 </file>
 
@@ -31317,6 +31585,18 @@
   <p:clrMapOvr>
     <a:masterClrMapping/>
   </p:clrMapOvr>
+  <mc:AlternateContent xmlns:mc="http://schemas.openxmlformats.org/markup-compatibility/2006" xmlns:p15="http://schemas.microsoft.com/office/powerpoint/2012/main">
+    <mc:Choice Requires="p15">
+      <p:transition xmlns:p14="http://schemas.microsoft.com/office/powerpoint/2010/main" spd="slow" p14:dur="2000" advTm="428">
+        <p15:prstTrans prst="crush"/>
+      </p:transition>
+    </mc:Choice>
+    <mc:Fallback xmlns="">
+      <p:transition spd="slow" advTm="428">
+        <p:fade/>
+      </p:transition>
+    </mc:Fallback>
+  </mc:AlternateContent>
 </p:sld>
 </file>
 
@@ -31533,6 +31813,9 @@
   <p:clrMapOvr>
     <a:masterClrMapping/>
   </p:clrMapOvr>
+  <p:transition spd="med" advTm="186">
+    <p:pull/>
+  </p:transition>
 </p:sld>
 </file>
 
@@ -32258,6 +32541,18 @@
   <p:clrMapOvr>
     <a:masterClrMapping/>
   </p:clrMapOvr>
+  <mc:AlternateContent xmlns:mc="http://schemas.openxmlformats.org/markup-compatibility/2006" xmlns:p14="http://schemas.microsoft.com/office/powerpoint/2010/main">
+    <mc:Choice Requires="p14">
+      <p:transition spd="slow" p14:dur="2500" advTm="353">
+        <p:checker/>
+      </p:transition>
+    </mc:Choice>
+    <mc:Fallback xmlns="">
+      <p:transition spd="slow" advTm="353">
+        <p:checker/>
+      </p:transition>
+    </mc:Fallback>
+  </mc:AlternateContent>
 </p:sld>
 </file>
 
@@ -33290,10 +33585,138 @@
   <p:clrMapOvr>
     <a:masterClrMapping/>
   </p:clrMapOvr>
+  <mc:AlternateContent xmlns:mc="http://schemas.openxmlformats.org/markup-compatibility/2006" xmlns:p15="http://schemas.microsoft.com/office/powerpoint/2012/main">
+    <mc:Choice Requires="p15">
+      <p:transition xmlns:p14="http://schemas.microsoft.com/office/powerpoint/2010/main" spd="slow" p14:dur="1250" advTm="385">
+        <p15:prstTrans prst="airplane"/>
+      </p:transition>
+    </mc:Choice>
+    <mc:Fallback xmlns="">
+      <p:transition spd="slow" advTm="385">
+        <p:fade/>
+      </p:transition>
+    </mc:Fallback>
+  </mc:AlternateContent>
 </p:sld>
 </file>
 
 <file path=ppt/slides/slide37.xml><?xml version="1.0" encoding="utf-8"?>
+<p:sld xmlns:a="http://schemas.openxmlformats.org/drawingml/2006/main" xmlns:r="http://schemas.openxmlformats.org/officeDocument/2006/relationships" xmlns:p="http://schemas.openxmlformats.org/presentationml/2006/main">
+  <p:cSld>
+    <p:spTree>
+      <p:nvGrpSpPr>
+        <p:cNvPr id="1" name=""/>
+        <p:cNvGrpSpPr/>
+        <p:nvPr/>
+      </p:nvGrpSpPr>
+      <p:grpSpPr>
+        <a:xfrm>
+          <a:off x="0" y="0"/>
+          <a:ext cx="0" cy="0"/>
+          <a:chOff x="0" y="0"/>
+          <a:chExt cx="0" cy="0"/>
+        </a:xfrm>
+      </p:grpSpPr>
+      <p:pic>
+        <p:nvPicPr>
+          <p:cNvPr id="1026" name="Picture 2" descr="A Detailed Overview of AWS API Gateway | DeBrie Advisory">
+            <a:extLst>
+              <a:ext uri="{FF2B5EF4-FFF2-40B4-BE49-F238E27FC236}">
+                <a16:creationId xmlns:a16="http://schemas.microsoft.com/office/drawing/2014/main" id="{D64589E5-2EE0-D27C-52C5-50294A56DF40}"/>
+              </a:ext>
+            </a:extLst>
+          </p:cNvPr>
+          <p:cNvPicPr>
+            <a:picLocks noChangeAspect="1" noChangeArrowheads="1"/>
+          </p:cNvPicPr>
+          <p:nvPr/>
+        </p:nvPicPr>
+        <p:blipFill>
+          <a:blip r:embed="rId2">
+            <a:extLst>
+              <a:ext uri="{28A0092B-C50C-407E-A947-70E740481C1C}">
+                <a14:useLocalDpi xmlns:a14="http://schemas.microsoft.com/office/drawing/2010/main" val="0"/>
+              </a:ext>
+            </a:extLst>
+          </a:blip>
+          <a:srcRect/>
+          <a:stretch>
+            <a:fillRect/>
+          </a:stretch>
+        </p:blipFill>
+        <p:spPr bwMode="auto">
+          <a:xfrm>
+            <a:off x="167148" y="899959"/>
+            <a:ext cx="12024852" cy="5353050"/>
+          </a:xfrm>
+          <a:prstGeom prst="rect">
+            <a:avLst/>
+          </a:prstGeom>
+          <a:noFill/>
+          <a:extLst>
+            <a:ext uri="{909E8E84-426E-40DD-AFC4-6F175D3DCCD1}">
+              <a14:hiddenFill xmlns:a14="http://schemas.microsoft.com/office/drawing/2010/main">
+                <a:solidFill>
+                  <a:srgbClr val="FFFFFF"/>
+                </a:solidFill>
+              </a14:hiddenFill>
+            </a:ext>
+          </a:extLst>
+        </p:spPr>
+      </p:pic>
+      <p:sp>
+        <p:nvSpPr>
+          <p:cNvPr id="3" name="TextBox 2">
+            <a:extLst>
+              <a:ext uri="{FF2B5EF4-FFF2-40B4-BE49-F238E27FC236}">
+                <a16:creationId xmlns:a16="http://schemas.microsoft.com/office/drawing/2014/main" id="{E37D67E1-9630-8C5D-9AC0-25458B27DA3C}"/>
+              </a:ext>
+            </a:extLst>
+          </p:cNvPr>
+          <p:cNvSpPr txBox="1"/>
+          <p:nvPr/>
+        </p:nvSpPr>
+        <p:spPr>
+          <a:xfrm>
+            <a:off x="3559277" y="491613"/>
+            <a:ext cx="6676103" cy="461665"/>
+          </a:xfrm>
+          <a:prstGeom prst="rect">
+            <a:avLst/>
+          </a:prstGeom>
+          <a:noFill/>
+        </p:spPr>
+        <p:txBody>
+          <a:bodyPr wrap="square">
+            <a:spAutoFit/>
+          </a:bodyPr>
+          <a:lstStyle/>
+          <a:p>
+            <a:r>
+              <a:rPr lang="en-IN" sz="2400" b="1" dirty="0">
+                <a:solidFill>
+                  <a:srgbClr val="00B0F0"/>
+                </a:solidFill>
+              </a:rPr>
+              <a:t>API Gateway Architecture Flow </a:t>
+            </a:r>
+          </a:p>
+        </p:txBody>
+      </p:sp>
+    </p:spTree>
+    <p:extLst>
+      <p:ext uri="{BB962C8B-B14F-4D97-AF65-F5344CB8AC3E}">
+        <p14:creationId xmlns:p14="http://schemas.microsoft.com/office/powerpoint/2010/main" val="298184929"/>
+      </p:ext>
+    </p:extLst>
+  </p:cSld>
+  <p:clrMapOvr>
+    <a:masterClrMapping/>
+  </p:clrMapOvr>
+</p:sld>
+</file>
+
+<file path=ppt/slides/slide38.xml><?xml version="1.0" encoding="utf-8"?>
 <p:sld xmlns:a="http://schemas.openxmlformats.org/drawingml/2006/main" xmlns:r="http://schemas.openxmlformats.org/officeDocument/2006/relationships" xmlns:p="http://schemas.openxmlformats.org/presentationml/2006/main">
   <p:cSld>
     <p:bg>
@@ -34029,10 +34452,22 @@
   <p:clrMapOvr>
     <a:masterClrMapping/>
   </p:clrMapOvr>
+  <mc:AlternateContent xmlns:mc="http://schemas.openxmlformats.org/markup-compatibility/2006" xmlns:p15="http://schemas.microsoft.com/office/powerpoint/2012/main">
+    <mc:Choice Requires="p15">
+      <p:transition xmlns:p14="http://schemas.microsoft.com/office/powerpoint/2010/main" spd="slow" p14:dur="2000" advTm="195">
+        <p15:prstTrans prst="fracture"/>
+      </p:transition>
+    </mc:Choice>
+    <mc:Fallback xmlns="">
+      <p:transition spd="slow" advTm="195">
+        <p:fade/>
+      </p:transition>
+    </mc:Fallback>
+  </mc:AlternateContent>
 </p:sld>
 </file>
 
-<file path=ppt/slides/slide38.xml><?xml version="1.0" encoding="utf-8"?>
+<file path=ppt/slides/slide39.xml><?xml version="1.0" encoding="utf-8"?>
 <p:sld xmlns:a="http://schemas.openxmlformats.org/drawingml/2006/main" xmlns:r="http://schemas.openxmlformats.org/officeDocument/2006/relationships" xmlns:p="http://schemas.openxmlformats.org/presentationml/2006/main">
   <p:cSld>
     <p:bg>
@@ -34867,629 +35302,18 @@
   <p:clrMapOvr>
     <a:masterClrMapping/>
   </p:clrMapOvr>
-</p:sld>
-</file>
-
-<file path=ppt/slides/slide39.xml><?xml version="1.0" encoding="utf-8"?>
-<p:sld xmlns:a="http://schemas.openxmlformats.org/drawingml/2006/main" xmlns:r="http://schemas.openxmlformats.org/officeDocument/2006/relationships" xmlns:p="http://schemas.openxmlformats.org/presentationml/2006/main">
-  <p:cSld>
-    <p:bg>
-      <p:bgPr>
-        <a:solidFill>
-          <a:srgbClr val="232F3E"/>
-        </a:solidFill>
-        <a:effectLst/>
-      </p:bgPr>
-    </p:bg>
-    <p:spTree>
-      <p:nvGrpSpPr>
-        <p:cNvPr id="1" name="Shape 741"/>
-        <p:cNvGrpSpPr/>
-        <p:nvPr/>
-      </p:nvGrpSpPr>
-      <p:grpSpPr>
-        <a:xfrm>
-          <a:off x="0" y="0"/>
-          <a:ext cx="0" cy="0"/>
-          <a:chOff x="0" y="0"/>
-          <a:chExt cx="0" cy="0"/>
-        </a:xfrm>
-      </p:grpSpPr>
-      <p:pic>
-        <p:nvPicPr>
-          <p:cNvPr id="742" name="Google Shape;742;p50" descr="image.png"/>
-          <p:cNvPicPr preferRelativeResize="0"/>
-          <p:nvPr/>
-        </p:nvPicPr>
-        <p:blipFill rotWithShape="1">
-          <a:blip r:embed="rId3">
-            <a:alphaModFix/>
-          </a:blip>
-          <a:srcRect/>
-          <a:stretch/>
-        </p:blipFill>
-        <p:spPr>
-          <a:xfrm>
-            <a:off x="0" y="6048375"/>
-            <a:ext cx="12192000" cy="809625"/>
-          </a:xfrm>
-          <a:prstGeom prst="rect">
-            <a:avLst/>
-          </a:prstGeom>
-          <a:noFill/>
-          <a:ln>
-            <a:noFill/>
-          </a:ln>
-        </p:spPr>
-      </p:pic>
-      <p:sp>
-        <p:nvSpPr>
-          <p:cNvPr id="743" name="Google Shape;743;p50"/>
-          <p:cNvSpPr txBox="1"/>
-          <p:nvPr/>
-        </p:nvSpPr>
-        <p:spPr>
-          <a:xfrm>
-            <a:off x="571500" y="476250"/>
-            <a:ext cx="11601450" cy="499020"/>
-          </a:xfrm>
-          <a:prstGeom prst="rect">
-            <a:avLst/>
-          </a:prstGeom>
-          <a:noFill/>
-          <a:ln>
-            <a:noFill/>
-          </a:ln>
-        </p:spPr>
-        <p:txBody>
-          <a:bodyPr spcFirstLastPara="1" wrap="square" lIns="0" tIns="0" rIns="0" bIns="0" anchor="t" anchorCtr="0">
-            <a:spAutoFit/>
-          </a:bodyPr>
-          <a:lstStyle/>
-          <a:p>
-            <a:pPr marL="0" marR="0" lvl="0" indent="0" algn="l" rtl="0">
-              <a:lnSpc>
-                <a:spcPct val="119968"/>
-              </a:lnSpc>
-              <a:spcBef>
-                <a:spcPts val="0"/>
-              </a:spcBef>
-              <a:spcAft>
-                <a:spcPts val="0"/>
-              </a:spcAft>
-              <a:buNone/>
-            </a:pPr>
-            <a:r>
-              <a:rPr lang="en-US" sz="3150" b="1" i="0" u="none" strike="noStrike" cap="none">
-                <a:solidFill>
-                  <a:srgbClr val="FF9900"/>
-                </a:solidFill>
-                <a:latin typeface="Inter"/>
-                <a:ea typeface="Inter"/>
-                <a:cs typeface="Inter"/>
-                <a:sym typeface="Inter"/>
-              </a:rPr>
-              <a:t>Common Interview Questions</a:t>
-            </a:r>
-            <a:endParaRPr/>
-          </a:p>
-        </p:txBody>
-      </p:sp>
-      <p:sp>
-        <p:nvSpPr>
-          <p:cNvPr id="744" name="Google Shape;744;p50"/>
-          <p:cNvSpPr/>
-          <p:nvPr/>
-        </p:nvSpPr>
-        <p:spPr>
-          <a:xfrm>
-            <a:off x="571500" y="1051470"/>
-            <a:ext cx="11049000" cy="19050"/>
-          </a:xfrm>
-          <a:prstGeom prst="rect">
-            <a:avLst/>
-          </a:prstGeom>
-          <a:solidFill>
-            <a:srgbClr val="FF9900"/>
-          </a:solidFill>
-          <a:ln>
-            <a:noFill/>
-          </a:ln>
-        </p:spPr>
-        <p:txBody>
-          <a:bodyPr spcFirstLastPara="1" wrap="square" lIns="91425" tIns="45700" rIns="91425" bIns="45700" anchor="ctr" anchorCtr="0">
-            <a:noAutofit/>
-          </a:bodyPr>
-          <a:lstStyle/>
-          <a:p>
-            <a:pPr marL="0" marR="0" lvl="0" indent="0" algn="ctr" rtl="0">
-              <a:spcBef>
-                <a:spcPts val="0"/>
-              </a:spcBef>
-              <a:spcAft>
-                <a:spcPts val="0"/>
-              </a:spcAft>
-              <a:buNone/>
-            </a:pPr>
-            <a:endParaRPr sz="1800" b="0" i="0" u="none" strike="noStrike" cap="none">
-              <a:solidFill>
-                <a:schemeClr val="dk1"/>
-              </a:solidFill>
-              <a:latin typeface="Calibri"/>
-              <a:ea typeface="Calibri"/>
-              <a:cs typeface="Calibri"/>
-              <a:sym typeface="Calibri"/>
-            </a:endParaRPr>
-          </a:p>
-        </p:txBody>
-      </p:sp>
-      <p:sp>
-        <p:nvSpPr>
-          <p:cNvPr id="745" name="Google Shape;745;p50"/>
-          <p:cNvSpPr txBox="1"/>
-          <p:nvPr/>
-        </p:nvSpPr>
-        <p:spPr>
-          <a:xfrm>
-            <a:off x="381000" y="6300787"/>
-            <a:ext cx="890438" cy="323850"/>
-          </a:xfrm>
-          <a:prstGeom prst="rect">
-            <a:avLst/>
-          </a:prstGeom>
-          <a:noFill/>
-          <a:ln>
-            <a:noFill/>
-          </a:ln>
-        </p:spPr>
-        <p:txBody>
-          <a:bodyPr spcFirstLastPara="1" wrap="square" lIns="0" tIns="0" rIns="0" bIns="0" anchor="t" anchorCtr="0">
-            <a:spAutoFit/>
-          </a:bodyPr>
-          <a:lstStyle/>
-          <a:p>
-            <a:pPr marL="0" marR="0" lvl="0" indent="0" algn="l" rtl="0">
-              <a:spcBef>
-                <a:spcPts val="0"/>
-              </a:spcBef>
-              <a:spcAft>
-                <a:spcPts val="0"/>
-              </a:spcAft>
-              <a:buNone/>
-            </a:pPr>
-            <a:r>
-              <a:rPr lang="en-US" sz="1050" b="1" i="0" u="none" strike="noStrike" cap="none">
-                <a:solidFill>
-                  <a:srgbClr val="FF9900"/>
-                </a:solidFill>
-                <a:latin typeface="Inter"/>
-                <a:ea typeface="Inter"/>
-                <a:cs typeface="Inter"/>
-                <a:sym typeface="Inter"/>
-              </a:rPr>
-              <a:t>SPEAKER NOTES:</a:t>
-            </a:r>
-            <a:endParaRPr/>
-          </a:p>
-        </p:txBody>
-      </p:sp>
-      <p:sp>
-        <p:nvSpPr>
-          <p:cNvPr id="746" name="Google Shape;746;p50"/>
-          <p:cNvSpPr txBox="1"/>
-          <p:nvPr/>
-        </p:nvSpPr>
-        <p:spPr>
-          <a:xfrm>
-            <a:off x="904875" y="2030610"/>
-            <a:ext cx="10715625" cy="628650"/>
-          </a:xfrm>
-          <a:prstGeom prst="rect">
-            <a:avLst/>
-          </a:prstGeom>
-          <a:noFill/>
-          <a:ln>
-            <a:noFill/>
-          </a:ln>
-        </p:spPr>
-        <p:txBody>
-          <a:bodyPr spcFirstLastPara="1" wrap="square" lIns="0" tIns="0" rIns="0" bIns="0" anchor="t" anchorCtr="0">
-            <a:spAutoFit/>
-          </a:bodyPr>
-          <a:lstStyle/>
-          <a:p>
-            <a:pPr marL="0" marR="0" lvl="0" indent="0" algn="l" rtl="0">
-              <a:lnSpc>
-                <a:spcPct val="137500"/>
-              </a:lnSpc>
-              <a:spcBef>
-                <a:spcPts val="0"/>
-              </a:spcBef>
-              <a:spcAft>
-                <a:spcPts val="0"/>
-              </a:spcAft>
-              <a:buNone/>
-            </a:pPr>
-            <a:r>
-              <a:rPr lang="en-US" sz="1650" b="1" i="0" u="none" strike="noStrike" cap="none">
-                <a:solidFill>
-                  <a:srgbClr val="FFFFFF"/>
-                </a:solidFill>
-                <a:latin typeface="Inter"/>
-                <a:ea typeface="Inter"/>
-                <a:cs typeface="Inter"/>
-                <a:sym typeface="Inter"/>
-              </a:rPr>
-              <a:t>What is the maximum timeout of API Gateway?</a:t>
-            </a:r>
-            <a:br>
-              <a:rPr lang="en-US" sz="1800" b="0" i="0" u="none" strike="noStrike" cap="none">
-                <a:solidFill>
-                  <a:schemeClr val="dk1"/>
-                </a:solidFill>
-                <a:latin typeface="Calibri"/>
-                <a:ea typeface="Calibri"/>
-                <a:cs typeface="Calibri"/>
-                <a:sym typeface="Calibri"/>
-              </a:rPr>
-            </a:br>
-            <a:r>
-              <a:rPr lang="en-US" sz="1650" b="0" i="0" u="none" strike="noStrike" cap="none">
-                <a:solidFill>
-                  <a:srgbClr val="2ECC71"/>
-                </a:solidFill>
-                <a:latin typeface="Inter"/>
-                <a:ea typeface="Inter"/>
-                <a:cs typeface="Inter"/>
-                <a:sym typeface="Inter"/>
-              </a:rPr>
-              <a:t>29 seconds (Hard limit, cannot be increased).</a:t>
-            </a:r>
-            <a:endParaRPr/>
-          </a:p>
-        </p:txBody>
-      </p:sp>
-      <p:sp>
-        <p:nvSpPr>
-          <p:cNvPr id="747" name="Google Shape;747;p50"/>
-          <p:cNvSpPr txBox="1"/>
-          <p:nvPr/>
-        </p:nvSpPr>
-        <p:spPr>
-          <a:xfrm>
-            <a:off x="904875" y="2830710"/>
-            <a:ext cx="10715625" cy="628650"/>
-          </a:xfrm>
-          <a:prstGeom prst="rect">
-            <a:avLst/>
-          </a:prstGeom>
-          <a:noFill/>
-          <a:ln>
-            <a:noFill/>
-          </a:ln>
-        </p:spPr>
-        <p:txBody>
-          <a:bodyPr spcFirstLastPara="1" wrap="square" lIns="0" tIns="0" rIns="0" bIns="0" anchor="t" anchorCtr="0">
-            <a:spAutoFit/>
-          </a:bodyPr>
-          <a:lstStyle/>
-          <a:p>
-            <a:pPr marL="0" marR="0" lvl="0" indent="0" algn="l" rtl="0">
-              <a:lnSpc>
-                <a:spcPct val="137500"/>
-              </a:lnSpc>
-              <a:spcBef>
-                <a:spcPts val="0"/>
-              </a:spcBef>
-              <a:spcAft>
-                <a:spcPts val="0"/>
-              </a:spcAft>
-              <a:buNone/>
-            </a:pPr>
-            <a:r>
-              <a:rPr lang="en-US" sz="1650" b="1" i="0" u="none" strike="noStrike" cap="none">
-                <a:solidFill>
-                  <a:srgbClr val="FFFFFF"/>
-                </a:solidFill>
-                <a:latin typeface="Inter"/>
-                <a:ea typeface="Inter"/>
-                <a:cs typeface="Inter"/>
-                <a:sym typeface="Inter"/>
-              </a:rPr>
-              <a:t>Difference between REST and HTTP APIs?</a:t>
-            </a:r>
-            <a:br>
-              <a:rPr lang="en-US" sz="1800" b="0" i="0" u="none" strike="noStrike" cap="none">
-                <a:solidFill>
-                  <a:schemeClr val="dk1"/>
-                </a:solidFill>
-                <a:latin typeface="Calibri"/>
-                <a:ea typeface="Calibri"/>
-                <a:cs typeface="Calibri"/>
-                <a:sym typeface="Calibri"/>
-              </a:rPr>
-            </a:br>
-            <a:r>
-              <a:rPr lang="en-US" sz="1650" b="0" i="0" u="none" strike="noStrike" cap="none">
-                <a:solidFill>
-                  <a:srgbClr val="2ECC71"/>
-                </a:solidFill>
-                <a:latin typeface="Inter"/>
-                <a:ea typeface="Inter"/>
-                <a:cs typeface="Inter"/>
-                <a:sym typeface="Inter"/>
-              </a:rPr>
-              <a:t>REST has full features (WAF, caching). HTTP is cheaper/faster.</a:t>
-            </a:r>
-            <a:endParaRPr/>
-          </a:p>
-        </p:txBody>
-      </p:sp>
-      <p:sp>
-        <p:nvSpPr>
-          <p:cNvPr id="748" name="Google Shape;748;p50"/>
-          <p:cNvSpPr txBox="1"/>
-          <p:nvPr/>
-        </p:nvSpPr>
-        <p:spPr>
-          <a:xfrm>
-            <a:off x="904875" y="3630810"/>
-            <a:ext cx="10715625" cy="628650"/>
-          </a:xfrm>
-          <a:prstGeom prst="rect">
-            <a:avLst/>
-          </a:prstGeom>
-          <a:noFill/>
-          <a:ln>
-            <a:noFill/>
-          </a:ln>
-        </p:spPr>
-        <p:txBody>
-          <a:bodyPr spcFirstLastPara="1" wrap="square" lIns="0" tIns="0" rIns="0" bIns="0" anchor="t" anchorCtr="0">
-            <a:spAutoFit/>
-          </a:bodyPr>
-          <a:lstStyle/>
-          <a:p>
-            <a:pPr marL="0" marR="0" lvl="0" indent="0" algn="l" rtl="0">
-              <a:lnSpc>
-                <a:spcPct val="137500"/>
-              </a:lnSpc>
-              <a:spcBef>
-                <a:spcPts val="0"/>
-              </a:spcBef>
-              <a:spcAft>
-                <a:spcPts val="0"/>
-              </a:spcAft>
-              <a:buNone/>
-            </a:pPr>
-            <a:r>
-              <a:rPr lang="en-US" sz="1650" b="1" i="0" u="none" strike="noStrike" cap="none">
-                <a:solidFill>
-                  <a:srgbClr val="FFFFFF"/>
-                </a:solidFill>
-                <a:latin typeface="Inter"/>
-                <a:ea typeface="Inter"/>
-                <a:cs typeface="Inter"/>
-                <a:sym typeface="Inter"/>
-              </a:rPr>
-              <a:t>What is throttling?</a:t>
-            </a:r>
-            <a:br>
-              <a:rPr lang="en-US" sz="1800" b="0" i="0" u="none" strike="noStrike" cap="none">
-                <a:solidFill>
-                  <a:schemeClr val="dk1"/>
-                </a:solidFill>
-                <a:latin typeface="Calibri"/>
-                <a:ea typeface="Calibri"/>
-                <a:cs typeface="Calibri"/>
-                <a:sym typeface="Calibri"/>
-              </a:rPr>
-            </a:br>
-            <a:r>
-              <a:rPr lang="en-US" sz="1650" b="0" i="0" u="none" strike="noStrike" cap="none">
-                <a:solidFill>
-                  <a:srgbClr val="2ECC71"/>
-                </a:solidFill>
-                <a:latin typeface="Inter"/>
-                <a:ea typeface="Inter"/>
-                <a:cs typeface="Inter"/>
-                <a:sym typeface="Inter"/>
-              </a:rPr>
-              <a:t>Limiting request rates to protect backend stability.</a:t>
-            </a:r>
-            <a:endParaRPr/>
-          </a:p>
-        </p:txBody>
-      </p:sp>
-      <p:sp>
-        <p:nvSpPr>
-          <p:cNvPr id="749" name="Google Shape;749;p50"/>
-          <p:cNvSpPr txBox="1"/>
-          <p:nvPr/>
-        </p:nvSpPr>
-        <p:spPr>
-          <a:xfrm>
-            <a:off x="904875" y="4430910"/>
-            <a:ext cx="10715625" cy="628650"/>
-          </a:xfrm>
-          <a:prstGeom prst="rect">
-            <a:avLst/>
-          </a:prstGeom>
-          <a:noFill/>
-          <a:ln>
-            <a:noFill/>
-          </a:ln>
-        </p:spPr>
-        <p:txBody>
-          <a:bodyPr spcFirstLastPara="1" wrap="square" lIns="0" tIns="0" rIns="0" bIns="0" anchor="t" anchorCtr="0">
-            <a:spAutoFit/>
-          </a:bodyPr>
-          <a:lstStyle/>
-          <a:p>
-            <a:pPr marL="0" marR="0" lvl="0" indent="0" algn="l" rtl="0">
-              <a:lnSpc>
-                <a:spcPct val="137500"/>
-              </a:lnSpc>
-              <a:spcBef>
-                <a:spcPts val="0"/>
-              </a:spcBef>
-              <a:spcAft>
-                <a:spcPts val="0"/>
-              </a:spcAft>
-              <a:buNone/>
-            </a:pPr>
-            <a:r>
-              <a:rPr lang="en-US" sz="1650" b="1" i="0" u="none" strike="noStrike" cap="none">
-                <a:solidFill>
-                  <a:srgbClr val="FFFFFF"/>
-                </a:solidFill>
-                <a:latin typeface="Inter"/>
-                <a:ea typeface="Inter"/>
-                <a:cs typeface="Inter"/>
-                <a:sym typeface="Inter"/>
-              </a:rPr>
-              <a:t>What is the ANY method?</a:t>
-            </a:r>
-            <a:br>
-              <a:rPr lang="en-US" sz="1800" b="0" i="0" u="none" strike="noStrike" cap="none">
-                <a:solidFill>
-                  <a:schemeClr val="dk1"/>
-                </a:solidFill>
-                <a:latin typeface="Calibri"/>
-                <a:ea typeface="Calibri"/>
-                <a:cs typeface="Calibri"/>
-                <a:sym typeface="Calibri"/>
-              </a:rPr>
-            </a:br>
-            <a:r>
-              <a:rPr lang="en-US" sz="1650" b="0" i="0" u="none" strike="noStrike" cap="none">
-                <a:solidFill>
-                  <a:srgbClr val="2ECC71"/>
-                </a:solidFill>
-                <a:latin typeface="Inter"/>
-                <a:ea typeface="Inter"/>
-                <a:cs typeface="Inter"/>
-                <a:sym typeface="Inter"/>
-              </a:rPr>
-              <a:t>A wildcard route that captures all HTTP verbs (GET, POST, etc.).</a:t>
-            </a:r>
-            <a:endParaRPr/>
-          </a:p>
-        </p:txBody>
-      </p:sp>
-      <p:pic>
-        <p:nvPicPr>
-          <p:cNvPr id="750" name="Google Shape;750;p50" descr="image.png"/>
-          <p:cNvPicPr preferRelativeResize="0"/>
-          <p:nvPr/>
-        </p:nvPicPr>
-        <p:blipFill rotWithShape="1">
-          <a:blip r:embed="rId4">
-            <a:alphaModFix/>
-          </a:blip>
-          <a:srcRect/>
-          <a:stretch/>
-        </p:blipFill>
-        <p:spPr>
-          <a:xfrm>
-            <a:off x="571500" y="2073473"/>
-            <a:ext cx="142875" cy="200025"/>
-          </a:xfrm>
-          <a:prstGeom prst="rect">
-            <a:avLst/>
-          </a:prstGeom>
-          <a:noFill/>
-          <a:ln>
-            <a:noFill/>
-          </a:ln>
-        </p:spPr>
-      </p:pic>
-      <p:pic>
-        <p:nvPicPr>
-          <p:cNvPr id="751" name="Google Shape;751;p50" descr="image.png"/>
-          <p:cNvPicPr preferRelativeResize="0"/>
-          <p:nvPr/>
-        </p:nvPicPr>
-        <p:blipFill rotWithShape="1">
-          <a:blip r:embed="rId4">
-            <a:alphaModFix/>
-          </a:blip>
-          <a:srcRect/>
-          <a:stretch/>
-        </p:blipFill>
-        <p:spPr>
-          <a:xfrm>
-            <a:off x="571500" y="2873573"/>
-            <a:ext cx="142875" cy="200025"/>
-          </a:xfrm>
-          <a:prstGeom prst="rect">
-            <a:avLst/>
-          </a:prstGeom>
-          <a:noFill/>
-          <a:ln>
-            <a:noFill/>
-          </a:ln>
-        </p:spPr>
-      </p:pic>
-      <p:pic>
-        <p:nvPicPr>
-          <p:cNvPr id="752" name="Google Shape;752;p50" descr="image.png"/>
-          <p:cNvPicPr preferRelativeResize="0"/>
-          <p:nvPr/>
-        </p:nvPicPr>
-        <p:blipFill rotWithShape="1">
-          <a:blip r:embed="rId4">
-            <a:alphaModFix/>
-          </a:blip>
-          <a:srcRect/>
-          <a:stretch/>
-        </p:blipFill>
-        <p:spPr>
-          <a:xfrm>
-            <a:off x="571500" y="3673673"/>
-            <a:ext cx="142875" cy="200025"/>
-          </a:xfrm>
-          <a:prstGeom prst="rect">
-            <a:avLst/>
-          </a:prstGeom>
-          <a:noFill/>
-          <a:ln>
-            <a:noFill/>
-          </a:ln>
-        </p:spPr>
-      </p:pic>
-      <p:pic>
-        <p:nvPicPr>
-          <p:cNvPr id="753" name="Google Shape;753;p50" descr="image.png"/>
-          <p:cNvPicPr preferRelativeResize="0"/>
-          <p:nvPr/>
-        </p:nvPicPr>
-        <p:blipFill rotWithShape="1">
-          <a:blip r:embed="rId4">
-            <a:alphaModFix/>
-          </a:blip>
-          <a:srcRect/>
-          <a:stretch/>
-        </p:blipFill>
-        <p:spPr>
-          <a:xfrm>
-            <a:off x="571500" y="4473773"/>
-            <a:ext cx="142875" cy="200025"/>
-          </a:xfrm>
-          <a:prstGeom prst="rect">
-            <a:avLst/>
-          </a:prstGeom>
-          <a:noFill/>
-          <a:ln>
-            <a:noFill/>
-          </a:ln>
-        </p:spPr>
-      </p:pic>
-    </p:spTree>
-  </p:cSld>
-  <p:clrMapOvr>
-    <a:masterClrMapping/>
-  </p:clrMapOvr>
+  <mc:AlternateContent xmlns:mc="http://schemas.openxmlformats.org/markup-compatibility/2006" xmlns:p15="http://schemas.microsoft.com/office/powerpoint/2012/main">
+    <mc:Choice Requires="p15">
+      <p:transition xmlns:p14="http://schemas.microsoft.com/office/powerpoint/2010/main" spd="slow" p14:dur="2000" advTm="522">
+        <p15:prstTrans prst="fallOver"/>
+      </p:transition>
+    </mc:Choice>
+    <mc:Fallback xmlns="">
+      <p:transition spd="slow" advTm="522">
+        <p:fade/>
+      </p:transition>
+    </mc:Fallback>
+  </mc:AlternateContent>
 </p:sld>
 </file>
 
@@ -36159,10 +35983,657 @@
   <p:clrMapOvr>
     <a:masterClrMapping/>
   </p:clrMapOvr>
+  <mc:AlternateContent xmlns:mc="http://schemas.openxmlformats.org/markup-compatibility/2006" xmlns:p14="http://schemas.microsoft.com/office/powerpoint/2010/main">
+    <mc:Choice Requires="p14">
+      <p:transition spd="slow" p14:dur="1250" advTm="206">
+        <p14:flip dir="r"/>
+      </p:transition>
+    </mc:Choice>
+    <mc:Fallback xmlns="">
+      <p:transition spd="slow" advTm="206">
+        <p:fade/>
+      </p:transition>
+    </mc:Fallback>
+  </mc:AlternateContent>
 </p:sld>
 </file>
 
 <file path=ppt/slides/slide40.xml><?xml version="1.0" encoding="utf-8"?>
+<p:sld xmlns:a="http://schemas.openxmlformats.org/drawingml/2006/main" xmlns:r="http://schemas.openxmlformats.org/officeDocument/2006/relationships" xmlns:p="http://schemas.openxmlformats.org/presentationml/2006/main">
+  <p:cSld>
+    <p:bg>
+      <p:bgPr>
+        <a:solidFill>
+          <a:srgbClr val="232F3E"/>
+        </a:solidFill>
+        <a:effectLst/>
+      </p:bgPr>
+    </p:bg>
+    <p:spTree>
+      <p:nvGrpSpPr>
+        <p:cNvPr id="1" name="Shape 741"/>
+        <p:cNvGrpSpPr/>
+        <p:nvPr/>
+      </p:nvGrpSpPr>
+      <p:grpSpPr>
+        <a:xfrm>
+          <a:off x="0" y="0"/>
+          <a:ext cx="0" cy="0"/>
+          <a:chOff x="0" y="0"/>
+          <a:chExt cx="0" cy="0"/>
+        </a:xfrm>
+      </p:grpSpPr>
+      <p:pic>
+        <p:nvPicPr>
+          <p:cNvPr id="742" name="Google Shape;742;p50" descr="image.png"/>
+          <p:cNvPicPr preferRelativeResize="0"/>
+          <p:nvPr/>
+        </p:nvPicPr>
+        <p:blipFill rotWithShape="1">
+          <a:blip r:embed="rId3">
+            <a:alphaModFix/>
+          </a:blip>
+          <a:srcRect/>
+          <a:stretch/>
+        </p:blipFill>
+        <p:spPr>
+          <a:xfrm>
+            <a:off x="0" y="6048375"/>
+            <a:ext cx="12192000" cy="809625"/>
+          </a:xfrm>
+          <a:prstGeom prst="rect">
+            <a:avLst/>
+          </a:prstGeom>
+          <a:noFill/>
+          <a:ln>
+            <a:noFill/>
+          </a:ln>
+        </p:spPr>
+      </p:pic>
+      <p:sp>
+        <p:nvSpPr>
+          <p:cNvPr id="743" name="Google Shape;743;p50"/>
+          <p:cNvSpPr txBox="1"/>
+          <p:nvPr/>
+        </p:nvSpPr>
+        <p:spPr>
+          <a:xfrm>
+            <a:off x="571500" y="476250"/>
+            <a:ext cx="11601450" cy="499020"/>
+          </a:xfrm>
+          <a:prstGeom prst="rect">
+            <a:avLst/>
+          </a:prstGeom>
+          <a:noFill/>
+          <a:ln>
+            <a:noFill/>
+          </a:ln>
+        </p:spPr>
+        <p:txBody>
+          <a:bodyPr spcFirstLastPara="1" wrap="square" lIns="0" tIns="0" rIns="0" bIns="0" anchor="t" anchorCtr="0">
+            <a:spAutoFit/>
+          </a:bodyPr>
+          <a:lstStyle/>
+          <a:p>
+            <a:pPr marL="0" marR="0" lvl="0" indent="0" algn="l" rtl="0">
+              <a:lnSpc>
+                <a:spcPct val="119968"/>
+              </a:lnSpc>
+              <a:spcBef>
+                <a:spcPts val="0"/>
+              </a:spcBef>
+              <a:spcAft>
+                <a:spcPts val="0"/>
+              </a:spcAft>
+              <a:buNone/>
+            </a:pPr>
+            <a:r>
+              <a:rPr lang="en-US" sz="3150" b="1" i="0" u="none" strike="noStrike" cap="none">
+                <a:solidFill>
+                  <a:srgbClr val="FF9900"/>
+                </a:solidFill>
+                <a:latin typeface="Inter"/>
+                <a:ea typeface="Inter"/>
+                <a:cs typeface="Inter"/>
+                <a:sym typeface="Inter"/>
+              </a:rPr>
+              <a:t>Common Interview Questions</a:t>
+            </a:r>
+            <a:endParaRPr/>
+          </a:p>
+        </p:txBody>
+      </p:sp>
+      <p:sp>
+        <p:nvSpPr>
+          <p:cNvPr id="744" name="Google Shape;744;p50"/>
+          <p:cNvSpPr/>
+          <p:nvPr/>
+        </p:nvSpPr>
+        <p:spPr>
+          <a:xfrm>
+            <a:off x="571500" y="1051470"/>
+            <a:ext cx="11049000" cy="19050"/>
+          </a:xfrm>
+          <a:prstGeom prst="rect">
+            <a:avLst/>
+          </a:prstGeom>
+          <a:solidFill>
+            <a:srgbClr val="FF9900"/>
+          </a:solidFill>
+          <a:ln>
+            <a:noFill/>
+          </a:ln>
+        </p:spPr>
+        <p:txBody>
+          <a:bodyPr spcFirstLastPara="1" wrap="square" lIns="91425" tIns="45700" rIns="91425" bIns="45700" anchor="ctr" anchorCtr="0">
+            <a:noAutofit/>
+          </a:bodyPr>
+          <a:lstStyle/>
+          <a:p>
+            <a:pPr marL="0" marR="0" lvl="0" indent="0" algn="ctr" rtl="0">
+              <a:spcBef>
+                <a:spcPts val="0"/>
+              </a:spcBef>
+              <a:spcAft>
+                <a:spcPts val="0"/>
+              </a:spcAft>
+              <a:buNone/>
+            </a:pPr>
+            <a:endParaRPr sz="1800" b="0" i="0" u="none" strike="noStrike" cap="none">
+              <a:solidFill>
+                <a:schemeClr val="dk1"/>
+              </a:solidFill>
+              <a:latin typeface="Calibri"/>
+              <a:ea typeface="Calibri"/>
+              <a:cs typeface="Calibri"/>
+              <a:sym typeface="Calibri"/>
+            </a:endParaRPr>
+          </a:p>
+        </p:txBody>
+      </p:sp>
+      <p:sp>
+        <p:nvSpPr>
+          <p:cNvPr id="745" name="Google Shape;745;p50"/>
+          <p:cNvSpPr txBox="1"/>
+          <p:nvPr/>
+        </p:nvSpPr>
+        <p:spPr>
+          <a:xfrm>
+            <a:off x="381000" y="6300787"/>
+            <a:ext cx="890438" cy="323850"/>
+          </a:xfrm>
+          <a:prstGeom prst="rect">
+            <a:avLst/>
+          </a:prstGeom>
+          <a:noFill/>
+          <a:ln>
+            <a:noFill/>
+          </a:ln>
+        </p:spPr>
+        <p:txBody>
+          <a:bodyPr spcFirstLastPara="1" wrap="square" lIns="0" tIns="0" rIns="0" bIns="0" anchor="t" anchorCtr="0">
+            <a:spAutoFit/>
+          </a:bodyPr>
+          <a:lstStyle/>
+          <a:p>
+            <a:pPr marL="0" marR="0" lvl="0" indent="0" algn="l" rtl="0">
+              <a:spcBef>
+                <a:spcPts val="0"/>
+              </a:spcBef>
+              <a:spcAft>
+                <a:spcPts val="0"/>
+              </a:spcAft>
+              <a:buNone/>
+            </a:pPr>
+            <a:r>
+              <a:rPr lang="en-US" sz="1050" b="1" i="0" u="none" strike="noStrike" cap="none">
+                <a:solidFill>
+                  <a:srgbClr val="FF9900"/>
+                </a:solidFill>
+                <a:latin typeface="Inter"/>
+                <a:ea typeface="Inter"/>
+                <a:cs typeface="Inter"/>
+                <a:sym typeface="Inter"/>
+              </a:rPr>
+              <a:t>SPEAKER NOTES:</a:t>
+            </a:r>
+            <a:endParaRPr/>
+          </a:p>
+        </p:txBody>
+      </p:sp>
+      <p:sp>
+        <p:nvSpPr>
+          <p:cNvPr id="746" name="Google Shape;746;p50"/>
+          <p:cNvSpPr txBox="1"/>
+          <p:nvPr/>
+        </p:nvSpPr>
+        <p:spPr>
+          <a:xfrm>
+            <a:off x="904875" y="2030610"/>
+            <a:ext cx="10715625" cy="628650"/>
+          </a:xfrm>
+          <a:prstGeom prst="rect">
+            <a:avLst/>
+          </a:prstGeom>
+          <a:noFill/>
+          <a:ln>
+            <a:noFill/>
+          </a:ln>
+        </p:spPr>
+        <p:txBody>
+          <a:bodyPr spcFirstLastPara="1" wrap="square" lIns="0" tIns="0" rIns="0" bIns="0" anchor="t" anchorCtr="0">
+            <a:spAutoFit/>
+          </a:bodyPr>
+          <a:lstStyle/>
+          <a:p>
+            <a:pPr marL="0" marR="0" lvl="0" indent="0" algn="l" rtl="0">
+              <a:lnSpc>
+                <a:spcPct val="137500"/>
+              </a:lnSpc>
+              <a:spcBef>
+                <a:spcPts val="0"/>
+              </a:spcBef>
+              <a:spcAft>
+                <a:spcPts val="0"/>
+              </a:spcAft>
+              <a:buNone/>
+            </a:pPr>
+            <a:r>
+              <a:rPr lang="en-US" sz="1650" b="1" i="0" u="none" strike="noStrike" cap="none">
+                <a:solidFill>
+                  <a:srgbClr val="FFFFFF"/>
+                </a:solidFill>
+                <a:latin typeface="Inter"/>
+                <a:ea typeface="Inter"/>
+                <a:cs typeface="Inter"/>
+                <a:sym typeface="Inter"/>
+              </a:rPr>
+              <a:t>What is the maximum timeout of API Gateway?</a:t>
+            </a:r>
+            <a:br>
+              <a:rPr lang="en-US" sz="1800" b="0" i="0" u="none" strike="noStrike" cap="none">
+                <a:solidFill>
+                  <a:schemeClr val="dk1"/>
+                </a:solidFill>
+                <a:latin typeface="Calibri"/>
+                <a:ea typeface="Calibri"/>
+                <a:cs typeface="Calibri"/>
+                <a:sym typeface="Calibri"/>
+              </a:rPr>
+            </a:br>
+            <a:r>
+              <a:rPr lang="en-US" sz="1650" b="0" i="0" u="none" strike="noStrike" cap="none">
+                <a:solidFill>
+                  <a:srgbClr val="2ECC71"/>
+                </a:solidFill>
+                <a:latin typeface="Inter"/>
+                <a:ea typeface="Inter"/>
+                <a:cs typeface="Inter"/>
+                <a:sym typeface="Inter"/>
+              </a:rPr>
+              <a:t>29 seconds (Hard limit, cannot be increased).</a:t>
+            </a:r>
+            <a:endParaRPr/>
+          </a:p>
+        </p:txBody>
+      </p:sp>
+      <p:sp>
+        <p:nvSpPr>
+          <p:cNvPr id="747" name="Google Shape;747;p50"/>
+          <p:cNvSpPr txBox="1"/>
+          <p:nvPr/>
+        </p:nvSpPr>
+        <p:spPr>
+          <a:xfrm>
+            <a:off x="904875" y="2830710"/>
+            <a:ext cx="10715625" cy="628650"/>
+          </a:xfrm>
+          <a:prstGeom prst="rect">
+            <a:avLst/>
+          </a:prstGeom>
+          <a:noFill/>
+          <a:ln>
+            <a:noFill/>
+          </a:ln>
+        </p:spPr>
+        <p:txBody>
+          <a:bodyPr spcFirstLastPara="1" wrap="square" lIns="0" tIns="0" rIns="0" bIns="0" anchor="t" anchorCtr="0">
+            <a:spAutoFit/>
+          </a:bodyPr>
+          <a:lstStyle/>
+          <a:p>
+            <a:pPr marL="0" marR="0" lvl="0" indent="0" algn="l" rtl="0">
+              <a:lnSpc>
+                <a:spcPct val="137500"/>
+              </a:lnSpc>
+              <a:spcBef>
+                <a:spcPts val="0"/>
+              </a:spcBef>
+              <a:spcAft>
+                <a:spcPts val="0"/>
+              </a:spcAft>
+              <a:buNone/>
+            </a:pPr>
+            <a:r>
+              <a:rPr lang="en-US" sz="1650" b="1" i="0" u="none" strike="noStrike" cap="none">
+                <a:solidFill>
+                  <a:srgbClr val="FFFFFF"/>
+                </a:solidFill>
+                <a:latin typeface="Inter"/>
+                <a:ea typeface="Inter"/>
+                <a:cs typeface="Inter"/>
+                <a:sym typeface="Inter"/>
+              </a:rPr>
+              <a:t>Difference between REST and HTTP APIs?</a:t>
+            </a:r>
+            <a:br>
+              <a:rPr lang="en-US" sz="1800" b="0" i="0" u="none" strike="noStrike" cap="none">
+                <a:solidFill>
+                  <a:schemeClr val="dk1"/>
+                </a:solidFill>
+                <a:latin typeface="Calibri"/>
+                <a:ea typeface="Calibri"/>
+                <a:cs typeface="Calibri"/>
+                <a:sym typeface="Calibri"/>
+              </a:rPr>
+            </a:br>
+            <a:r>
+              <a:rPr lang="en-US" sz="1650" b="0" i="0" u="none" strike="noStrike" cap="none">
+                <a:solidFill>
+                  <a:srgbClr val="2ECC71"/>
+                </a:solidFill>
+                <a:latin typeface="Inter"/>
+                <a:ea typeface="Inter"/>
+                <a:cs typeface="Inter"/>
+                <a:sym typeface="Inter"/>
+              </a:rPr>
+              <a:t>REST has full features (WAF, caching). HTTP is cheaper/faster.</a:t>
+            </a:r>
+            <a:endParaRPr/>
+          </a:p>
+        </p:txBody>
+      </p:sp>
+      <p:sp>
+        <p:nvSpPr>
+          <p:cNvPr id="748" name="Google Shape;748;p50"/>
+          <p:cNvSpPr txBox="1"/>
+          <p:nvPr/>
+        </p:nvSpPr>
+        <p:spPr>
+          <a:xfrm>
+            <a:off x="904875" y="3630810"/>
+            <a:ext cx="10715625" cy="628650"/>
+          </a:xfrm>
+          <a:prstGeom prst="rect">
+            <a:avLst/>
+          </a:prstGeom>
+          <a:noFill/>
+          <a:ln>
+            <a:noFill/>
+          </a:ln>
+        </p:spPr>
+        <p:txBody>
+          <a:bodyPr spcFirstLastPara="1" wrap="square" lIns="0" tIns="0" rIns="0" bIns="0" anchor="t" anchorCtr="0">
+            <a:spAutoFit/>
+          </a:bodyPr>
+          <a:lstStyle/>
+          <a:p>
+            <a:pPr marL="0" marR="0" lvl="0" indent="0" algn="l" rtl="0">
+              <a:lnSpc>
+                <a:spcPct val="137500"/>
+              </a:lnSpc>
+              <a:spcBef>
+                <a:spcPts val="0"/>
+              </a:spcBef>
+              <a:spcAft>
+                <a:spcPts val="0"/>
+              </a:spcAft>
+              <a:buNone/>
+            </a:pPr>
+            <a:r>
+              <a:rPr lang="en-US" sz="1650" b="1" i="0" u="none" strike="noStrike" cap="none">
+                <a:solidFill>
+                  <a:srgbClr val="FFFFFF"/>
+                </a:solidFill>
+                <a:latin typeface="Inter"/>
+                <a:ea typeface="Inter"/>
+                <a:cs typeface="Inter"/>
+                <a:sym typeface="Inter"/>
+              </a:rPr>
+              <a:t>What is throttling?</a:t>
+            </a:r>
+            <a:br>
+              <a:rPr lang="en-US" sz="1800" b="0" i="0" u="none" strike="noStrike" cap="none">
+                <a:solidFill>
+                  <a:schemeClr val="dk1"/>
+                </a:solidFill>
+                <a:latin typeface="Calibri"/>
+                <a:ea typeface="Calibri"/>
+                <a:cs typeface="Calibri"/>
+                <a:sym typeface="Calibri"/>
+              </a:rPr>
+            </a:br>
+            <a:r>
+              <a:rPr lang="en-US" sz="1650" b="0" i="0" u="none" strike="noStrike" cap="none">
+                <a:solidFill>
+                  <a:srgbClr val="2ECC71"/>
+                </a:solidFill>
+                <a:latin typeface="Inter"/>
+                <a:ea typeface="Inter"/>
+                <a:cs typeface="Inter"/>
+                <a:sym typeface="Inter"/>
+              </a:rPr>
+              <a:t>Limiting request rates to protect backend stability.</a:t>
+            </a:r>
+            <a:endParaRPr/>
+          </a:p>
+        </p:txBody>
+      </p:sp>
+      <p:sp>
+        <p:nvSpPr>
+          <p:cNvPr id="749" name="Google Shape;749;p50"/>
+          <p:cNvSpPr txBox="1"/>
+          <p:nvPr/>
+        </p:nvSpPr>
+        <p:spPr>
+          <a:xfrm>
+            <a:off x="904875" y="4430910"/>
+            <a:ext cx="10715625" cy="628650"/>
+          </a:xfrm>
+          <a:prstGeom prst="rect">
+            <a:avLst/>
+          </a:prstGeom>
+          <a:noFill/>
+          <a:ln>
+            <a:noFill/>
+          </a:ln>
+        </p:spPr>
+        <p:txBody>
+          <a:bodyPr spcFirstLastPara="1" wrap="square" lIns="0" tIns="0" rIns="0" bIns="0" anchor="t" anchorCtr="0">
+            <a:spAutoFit/>
+          </a:bodyPr>
+          <a:lstStyle/>
+          <a:p>
+            <a:pPr marL="0" marR="0" lvl="0" indent="0" algn="l" rtl="0">
+              <a:lnSpc>
+                <a:spcPct val="137500"/>
+              </a:lnSpc>
+              <a:spcBef>
+                <a:spcPts val="0"/>
+              </a:spcBef>
+              <a:spcAft>
+                <a:spcPts val="0"/>
+              </a:spcAft>
+              <a:buNone/>
+            </a:pPr>
+            <a:r>
+              <a:rPr lang="en-US" sz="1650" b="1" i="0" u="none" strike="noStrike" cap="none">
+                <a:solidFill>
+                  <a:srgbClr val="FFFFFF"/>
+                </a:solidFill>
+                <a:latin typeface="Inter"/>
+                <a:ea typeface="Inter"/>
+                <a:cs typeface="Inter"/>
+                <a:sym typeface="Inter"/>
+              </a:rPr>
+              <a:t>What is the ANY method?</a:t>
+            </a:r>
+            <a:br>
+              <a:rPr lang="en-US" sz="1800" b="0" i="0" u="none" strike="noStrike" cap="none">
+                <a:solidFill>
+                  <a:schemeClr val="dk1"/>
+                </a:solidFill>
+                <a:latin typeface="Calibri"/>
+                <a:ea typeface="Calibri"/>
+                <a:cs typeface="Calibri"/>
+                <a:sym typeface="Calibri"/>
+              </a:rPr>
+            </a:br>
+            <a:r>
+              <a:rPr lang="en-US" sz="1650" b="0" i="0" u="none" strike="noStrike" cap="none">
+                <a:solidFill>
+                  <a:srgbClr val="2ECC71"/>
+                </a:solidFill>
+                <a:latin typeface="Inter"/>
+                <a:ea typeface="Inter"/>
+                <a:cs typeface="Inter"/>
+                <a:sym typeface="Inter"/>
+              </a:rPr>
+              <a:t>A wildcard route that captures all HTTP verbs (GET, POST, etc.).</a:t>
+            </a:r>
+            <a:endParaRPr/>
+          </a:p>
+        </p:txBody>
+      </p:sp>
+      <p:pic>
+        <p:nvPicPr>
+          <p:cNvPr id="750" name="Google Shape;750;p50" descr="image.png"/>
+          <p:cNvPicPr preferRelativeResize="0"/>
+          <p:nvPr/>
+        </p:nvPicPr>
+        <p:blipFill rotWithShape="1">
+          <a:blip r:embed="rId4">
+            <a:alphaModFix/>
+          </a:blip>
+          <a:srcRect/>
+          <a:stretch/>
+        </p:blipFill>
+        <p:spPr>
+          <a:xfrm>
+            <a:off x="571500" y="2073473"/>
+            <a:ext cx="142875" cy="200025"/>
+          </a:xfrm>
+          <a:prstGeom prst="rect">
+            <a:avLst/>
+          </a:prstGeom>
+          <a:noFill/>
+          <a:ln>
+            <a:noFill/>
+          </a:ln>
+        </p:spPr>
+      </p:pic>
+      <p:pic>
+        <p:nvPicPr>
+          <p:cNvPr id="751" name="Google Shape;751;p50" descr="image.png"/>
+          <p:cNvPicPr preferRelativeResize="0"/>
+          <p:nvPr/>
+        </p:nvPicPr>
+        <p:blipFill rotWithShape="1">
+          <a:blip r:embed="rId4">
+            <a:alphaModFix/>
+          </a:blip>
+          <a:srcRect/>
+          <a:stretch/>
+        </p:blipFill>
+        <p:spPr>
+          <a:xfrm>
+            <a:off x="571500" y="2873573"/>
+            <a:ext cx="142875" cy="200025"/>
+          </a:xfrm>
+          <a:prstGeom prst="rect">
+            <a:avLst/>
+          </a:prstGeom>
+          <a:noFill/>
+          <a:ln>
+            <a:noFill/>
+          </a:ln>
+        </p:spPr>
+      </p:pic>
+      <p:pic>
+        <p:nvPicPr>
+          <p:cNvPr id="752" name="Google Shape;752;p50" descr="image.png"/>
+          <p:cNvPicPr preferRelativeResize="0"/>
+          <p:nvPr/>
+        </p:nvPicPr>
+        <p:blipFill rotWithShape="1">
+          <a:blip r:embed="rId4">
+            <a:alphaModFix/>
+          </a:blip>
+          <a:srcRect/>
+          <a:stretch/>
+        </p:blipFill>
+        <p:spPr>
+          <a:xfrm>
+            <a:off x="571500" y="3673673"/>
+            <a:ext cx="142875" cy="200025"/>
+          </a:xfrm>
+          <a:prstGeom prst="rect">
+            <a:avLst/>
+          </a:prstGeom>
+          <a:noFill/>
+          <a:ln>
+            <a:noFill/>
+          </a:ln>
+        </p:spPr>
+      </p:pic>
+      <p:pic>
+        <p:nvPicPr>
+          <p:cNvPr id="753" name="Google Shape;753;p50" descr="image.png"/>
+          <p:cNvPicPr preferRelativeResize="0"/>
+          <p:nvPr/>
+        </p:nvPicPr>
+        <p:blipFill rotWithShape="1">
+          <a:blip r:embed="rId4">
+            <a:alphaModFix/>
+          </a:blip>
+          <a:srcRect/>
+          <a:stretch/>
+        </p:blipFill>
+        <p:spPr>
+          <a:xfrm>
+            <a:off x="571500" y="4473773"/>
+            <a:ext cx="142875" cy="200025"/>
+          </a:xfrm>
+          <a:prstGeom prst="rect">
+            <a:avLst/>
+          </a:prstGeom>
+          <a:noFill/>
+          <a:ln>
+            <a:noFill/>
+          </a:ln>
+        </p:spPr>
+      </p:pic>
+    </p:spTree>
+  </p:cSld>
+  <p:clrMapOvr>
+    <a:masterClrMapping/>
+  </p:clrMapOvr>
+  <mc:AlternateContent xmlns:mc="http://schemas.openxmlformats.org/markup-compatibility/2006" xmlns:p15="http://schemas.microsoft.com/office/powerpoint/2012/main">
+    <mc:Choice Requires="p15">
+      <p:transition xmlns:p14="http://schemas.microsoft.com/office/powerpoint/2010/main" spd="slow" p14:dur="2000" advTm="178">
+        <p15:prstTrans prst="wind"/>
+      </p:transition>
+    </mc:Choice>
+    <mc:Fallback xmlns="">
+      <p:transition spd="slow" advTm="178">
+        <p:fade/>
+      </p:transition>
+    </mc:Fallback>
+  </mc:AlternateContent>
+</p:sld>
+</file>
+
+<file path=ppt/slides/slide41.xml><?xml version="1.0" encoding="utf-8"?>
 <p:sld xmlns:a="http://schemas.openxmlformats.org/drawingml/2006/main" xmlns:r="http://schemas.openxmlformats.org/officeDocument/2006/relationships" xmlns:p="http://schemas.openxmlformats.org/presentationml/2006/main">
   <p:cSld>
     <p:bg>
@@ -36850,10 +37321,22 @@
   <p:clrMapOvr>
     <a:masterClrMapping/>
   </p:clrMapOvr>
+  <mc:AlternateContent xmlns:mc="http://schemas.openxmlformats.org/markup-compatibility/2006" xmlns:p14="http://schemas.microsoft.com/office/powerpoint/2010/main">
+    <mc:Choice Requires="p14">
+      <p:transition spd="slow" p14:dur="1400" advTm="1294">
+        <p14:doors dir="vert"/>
+      </p:transition>
+    </mc:Choice>
+    <mc:Fallback xmlns="">
+      <p:transition spd="slow" advTm="1294">
+        <p:fade/>
+      </p:transition>
+    </mc:Fallback>
+  </mc:AlternateContent>
 </p:sld>
 </file>
 
-<file path=ppt/slides/slide41.xml><?xml version="1.0" encoding="utf-8"?>
+<file path=ppt/slides/slide42.xml><?xml version="1.0" encoding="utf-8"?>
 <p:sld xmlns:a="http://schemas.openxmlformats.org/drawingml/2006/main" xmlns:r="http://schemas.openxmlformats.org/officeDocument/2006/relationships" xmlns:p="http://schemas.openxmlformats.org/presentationml/2006/main">
   <p:cSld>
     <p:bg>
@@ -37326,10 +37809,22 @@
   <p:clrMapOvr>
     <a:masterClrMapping/>
   </p:clrMapOvr>
+  <mc:AlternateContent xmlns:mc="http://schemas.openxmlformats.org/markup-compatibility/2006" xmlns:p15="http://schemas.microsoft.com/office/powerpoint/2012/main">
+    <mc:Choice Requires="p15">
+      <p:transition xmlns:p14="http://schemas.microsoft.com/office/powerpoint/2010/main" spd="slow" p14:dur="6000">
+        <p15:prstTrans prst="curtains"/>
+      </p:transition>
+    </mc:Choice>
+    <mc:Fallback xmlns="">
+      <p:transition spd="slow">
+        <p:fade/>
+      </p:transition>
+    </mc:Fallback>
+  </mc:AlternateContent>
 </p:sld>
 </file>
 
-<file path=ppt/slides/slide42.xml><?xml version="1.0" encoding="utf-8"?>
+<file path=ppt/slides/slide43.xml><?xml version="1.0" encoding="utf-8"?>
 <p:sld xmlns:a="http://schemas.openxmlformats.org/drawingml/2006/main" xmlns:r="http://schemas.openxmlformats.org/officeDocument/2006/relationships" xmlns:p="http://schemas.openxmlformats.org/presentationml/2006/main">
   <p:cSld>
     <p:bg>
@@ -38466,6 +38961,18 @@
   <p:clrMapOvr>
     <a:masterClrMapping/>
   </p:clrMapOvr>
+  <mc:AlternateContent xmlns:mc="http://schemas.openxmlformats.org/markup-compatibility/2006" xmlns:p15="http://schemas.microsoft.com/office/powerpoint/2012/main">
+    <mc:Choice Requires="p15">
+      <p:transition xmlns:p14="http://schemas.microsoft.com/office/powerpoint/2010/main" spd="slow" p14:dur="3250">
+        <p15:prstTrans prst="origami"/>
+      </p:transition>
+    </mc:Choice>
+    <mc:Fallback xmlns="">
+      <p:transition spd="slow">
+        <p:fade/>
+      </p:transition>
+    </mc:Fallback>
+  </mc:AlternateContent>
 </p:sld>
 </file>
 
@@ -39099,6 +39606,18 @@
   <p:clrMapOvr>
     <a:masterClrMapping/>
   </p:clrMapOvr>
+  <mc:AlternateContent xmlns:mc="http://schemas.openxmlformats.org/markup-compatibility/2006" xmlns:p14="http://schemas.microsoft.com/office/powerpoint/2010/main">
+    <mc:Choice Requires="p14">
+      <p:transition spd="slow" p14:dur="1600" advTm="337">
+        <p14:prism isInverted="1"/>
+      </p:transition>
+    </mc:Choice>
+    <mc:Fallback xmlns="">
+      <p:transition spd="slow" advTm="337">
+        <p:fade/>
+      </p:transition>
+    </mc:Fallback>
+  </mc:AlternateContent>
 </p:sld>
 </file>
 
@@ -39315,6 +39834,18 @@
   <p:clrMapOvr>
     <a:masterClrMapping/>
   </p:clrMapOvr>
+  <mc:AlternateContent xmlns:mc="http://schemas.openxmlformats.org/markup-compatibility/2006" xmlns:p15="http://schemas.microsoft.com/office/powerpoint/2012/main">
+    <mc:Choice Requires="p15">
+      <p:transition xmlns:p14="http://schemas.microsoft.com/office/powerpoint/2010/main" spd="slow" p14:dur="1250" advTm="1230">
+        <p15:prstTrans prst="peelOff"/>
+      </p:transition>
+    </mc:Choice>
+    <mc:Fallback xmlns="">
+      <p:transition spd="slow" advTm="1230">
+        <p:fade/>
+      </p:transition>
+    </mc:Fallback>
+  </mc:AlternateContent>
 </p:sld>
 </file>
 
@@ -40018,6 +40549,18 @@
   <p:clrMapOvr>
     <a:masterClrMapping/>
   </p:clrMapOvr>
+  <mc:AlternateContent xmlns:mc="http://schemas.openxmlformats.org/markup-compatibility/2006" xmlns:p14="http://schemas.microsoft.com/office/powerpoint/2010/main">
+    <mc:Choice Requires="p14">
+      <p:transition spd="slow" p14:dur="800" advTm="180">
+        <p:circle/>
+      </p:transition>
+    </mc:Choice>
+    <mc:Fallback xmlns="">
+      <p:transition spd="slow" advTm="180">
+        <p:circle/>
+      </p:transition>
+    </mc:Fallback>
+  </mc:AlternateContent>
 </p:sld>
 </file>
 
@@ -41029,6 +41572,9 @@
   <p:clrMapOvr>
     <a:masterClrMapping/>
   </p:clrMapOvr>
+  <p:transition spd="med" advTm="324">
+    <p:pull/>
+  </p:transition>
 </p:sld>
 </file>
 
@@ -41720,6 +42266,9 @@
   <p:clrMapOvr>
     <a:masterClrMapping/>
   </p:clrMapOvr>
+  <p:transition spd="slow" advTm="154">
+    <p:push dir="u"/>
+  </p:transition>
 </p:sld>
 </file>
 
